--- a/Werkcollege-2-waar-gaat-jouw-advies-heen.pptx
+++ b/Werkcollege-2-waar-gaat-jouw-advies-heen.pptx
@@ -859,7 +859,7 @@
           <a:lstStyle/>
           <a:p>
             <a:r>
-              <a:t>Laatste ronde. Kies een van de drie personen uit je ketting. Bedenk wat jouw opdrachtgever aan die persoon moet kunnen laten zien: een pagina, een cijfer, een plaatje. Schets dat op werkblad 2 en schrijf de zin erbij die je opdrachtgever erover zegt, want dat dwingt je scherp te zijn. Toets het daarna bij iemand anders.  [18:00 - 26:00]</a:t>
+              <a:t>Laatste ronde. Kies een van de drie personen uit je keten. Bedenk wat jouw opdrachtgever aan die persoon moet kunnen laten zien: een pagina, een cijfer, een plaatje. Schets dat op werkblad 2 en schrijf de zin erbij die je opdrachtgever erover zegt, want dat dwingt je scherp te zijn. Toets het daarna bij een medestudent die je vraagt die rol te spelen.  [18:00 - 26:00]</a:t>
             </a:r>
           </a:p>
         </p:txBody>
@@ -999,7 +999,7 @@
           <a:lstStyle/>
           <a:p>
             <a:r>
-              <a:t>Zet je ketting in je plan van aanpak of in je verantwoording: wie krijgt het na je opdrachtgever, in welke context, en wat heb je voor die persoon gemaakt. Twee of drie regels is genoeg. En vraag het je opdrachtgever gewoon: met wie ga jij dit delen? Dat is meteen een goed gesprek.  [28:30 - 30:00]</a:t>
+              <a:t>Zet je keten in je plan van aanpak of in je verantwoording: wie krijgt het na je opdrachtgever, in welke context, en wat heb je voor die persoon gemaakt. Twee of drie regels is genoeg. En vraag het je opdrachtgever gewoon: met wie ga jij dit delen? Dat is meteen een goed gesprek.  [28:30 - 30:00]</a:t>
             </a:r>
           </a:p>
         </p:txBody>
@@ -4757,7 +4757,7 @@
                 </a:solidFill>
                 <a:latin typeface="Courier New"/>
               </a:rPr>
-              <a:t>01 · DE KETTING</a:t>
+              <a:t>01 · DE KETEN</a:t>
             </a:r>
           </a:p>
         </p:txBody>
@@ -7772,7 +7772,7 @@
                 </a:solidFill>
                 <a:latin typeface="Arial"/>
               </a:rPr>
-              <a:t>Daarna: check elkaars ketting in tweetallen.</a:t>
+              <a:t>Daarna: check elkaars keten in tweetallen.</a:t>
             </a:r>
           </a:p>
         </p:txBody>
@@ -9407,7 +9407,7 @@
                 </a:solidFill>
                 <a:latin typeface="Arial"/>
               </a:rPr>
-              <a:t> uit je ketting van net.</a:t>
+              <a:t> uit je keten van net.</a:t>
             </a:r>
           </a:p>
         </p:txBody>
@@ -9726,7 +9726,7 @@
                 </a:solidFill>
                 <a:latin typeface="Arial"/>
               </a:rPr>
-              <a:t>Toets: stelt je toetser meteen de vraag die jij had opgeschreven?</a:t>
+              <a:t>Toets bij een medestudent: laat hem die rol spelen. Stelt hij meteen jouw vraag?</a:t>
             </a:r>
           </a:p>
         </p:txBody>
@@ -11104,7 +11104,7 @@
                 </a:solidFill>
                 <a:latin typeface="Arial Black"/>
               </a:rPr>
-              <a:t>NEEM JE KETTING MEE.</a:t>
+              <a:t>NEEM JE KETEN MEE.</a:t>
             </a:r>
           </a:p>
         </p:txBody>
